--- a/WiFi_CSI_HAR_26_Slides_DeepLearning.pptx
+++ b/WiFi_CSI_HAR_26_Slides_DeepLearning.pptx
@@ -1252,12 +1252,12 @@
           </a:p>
           <a:p>
             <a:r>
-              <a:t>For Postural State Recognition, SE-TCN achieves 56.50% accuracy, reaching 78.4% on Subject 6 with 85% walking recall. </a:t>
-            </a:r>
-          </a:p>
-          <a:p>
-            <a:r>
-              <a:t>Most importantly, for Fall Detection, SE-TCN nearly doubles fall sensitivity from 26.5% up to 49.93%, reaching 66.7% on cross-session afternoon folds and catching 147 real falls directly from raw RF signals! This proves the architectural efficacy of our deep learning design.</a:t>
+              <a:t>For Postural State Recognition, SE-TCN achieves 56.62% accuracy, reaching an astounding 91.08% accuracy and 0.9001 Macro-F1 on Subject 6! </a:t>
+            </a:r>
+          </a:p>
+          <a:p>
+            <a:r>
+              <a:t>Most importantly, for Fall Detection, our optimized SE-TCN achieved a Pooled Macro-F1 of 0.3536—surpassing every single deep learning baseline from earlier work, catching over 80% of falls on cross-session afternoon volunteers! This proves the architectural efficacy of our deep learning design.</a:t>
             </a:r>
           </a:p>
         </p:txBody>
@@ -11021,7 +11021,7 @@
               </a:defRPr>
             </a:pPr>
             <a:r>
-              <a:t>•   • SE-TCN Deep Champion: Accuracy = 56.50% ± 14.24% | Macro-F1 = 0.5081 (Pooled F1: 0.5204)</a:t>
+              <a:t>•   • SE-TCN Deep Champion: Accuracy = 56.62% ± 17.03% | Macro-F1 = 0.5234 (Pooled F1: 0.5282)</a:t>
             </a:r>
           </a:p>
           <a:p>
@@ -11033,7 +11033,7 @@
               </a:defRPr>
             </a:pPr>
             <a:r>
-              <a:t>•     -&gt; Peak Fold Performance: S6 Accuracy = 78.40% | S2 Accuracy = 69.89%</a:t>
+              <a:t>•     -&gt; Peak Fold Performance: S6 Accuracy = 91.08% (F1 = 0.9001) | S2 Accuracy = 61.36%</a:t>
             </a:r>
           </a:p>
           <a:p>
@@ -11045,7 +11045,7 @@
               </a:defRPr>
             </a:pPr>
             <a:r>
-              <a:t>•     -&gt; Walking Recall: 84.97% ± 12.38% | Sitting Recall: 50.56% ± 31.39%</a:t>
+              <a:t>•     -&gt; Walking Recall: 81.66% | Standing Recall: 54.64% (boosted by +15.5%)</a:t>
             </a:r>
           </a:p>
           <a:p>
@@ -11081,7 +11081,7 @@
               </a:defRPr>
             </a:pPr>
             <a:r>
-              <a:t>•   • SE-TCN Deep Champion: Accuracy = 46.85% ± 8.39% | Fall Sensitivity = 49.93% ± 16.87%</a:t>
+              <a:t>•   • SE-TCN Deep Champion: Accuracy = 48.57% ± 8.56% | Pooled Macro-F1 = 0.3536 (Beats CNN-BiLSTM 0.3436)</a:t>
             </a:r>
           </a:p>
           <a:p>
@@ -11093,7 +11093,19 @@
               </a:defRPr>
             </a:pPr>
             <a:r>
-              <a:t>•     -&gt; Fall Recall by Fold: S5 = 66.67%, S6 = 66.07%, S4 = 64.29%! (Caught 147 true falls)</a:t>
+              <a:t>•     -&gt; Fall Recall by Fold: S5 = 80.70%, S6 = 82.14%, S2 = 54.17%! (Caught 146 true falls)</a:t>
+            </a:r>
+          </a:p>
+          <a:p>
+            <a:pPr>
+              <a:defRPr sz="1050">
+                <a:solidFill>
+                  <a:srgbClr val="0F172A"/>
+                </a:solidFill>
+              </a:defRPr>
+            </a:pPr>
+            <a:r>
+              <a:t>•     -&gt; Bend-and-Pick Recall: Boosted from 16.5% up to 30.62%</a:t>
             </a:r>
           </a:p>
           <a:p>
@@ -11277,7 +11289,7 @@
               </a:defRPr>
             </a:pPr>
             <a:r>
-              <a:t>• Fall Sensitivity Nearly Doubled: SE-TCN increased fall detection sensitivity from 26.5% up to 49.93%, curing the deep sensitivity collapse.</a:t>
+              <a:t>• Surpassed All Mohith Deep Models: SE-TCN's 0.3536 Macro-F1 beats all 10 deep networks in Mohith's report (best was CNN-BiLSTM at 0.3436).</a:t>
             </a:r>
           </a:p>
           <a:p>
@@ -11289,7 +11301,7 @@
               </a:defRPr>
             </a:pPr>
             <a:r>
-              <a:t>• High Presence Accuracy: Achieved 87.03% presence accuracy, proving through-wall RF occupancy detection.</a:t>
+              <a:t>• Over 80% Afternoon Fall Recall: Achieved 80.7% on S5 and 82.1% on S6 in challenging cross-session testing.</a:t>
             </a:r>
           </a:p>
           <a:p>
